--- a/Publication/Учебная практика МДК 01.03.pptx
+++ b/Publication/Учебная практика МДК 01.03.pptx
@@ -111,7 +111,7 @@
   </p:defaultTextStyle>
   <p:extLst>
     <p:ext uri="{EFAFB233-063F-42B5-8137-9DF3F51BA10A}">
-      <p15:sldGuideLst xmlns:p15="http://schemas.microsoft.com/office/powerpoint/2012/main" xmlns="">
+      <p15:sldGuideLst xmlns="" xmlns:p15="http://schemas.microsoft.com/office/powerpoint/2012/main">
         <p15:guide id="1" orient="horz" pos="2160" userDrawn="1">
           <p15:clr>
             <a:srgbClr val="A4A3A4"/>
@@ -150,7 +150,7 @@
           <p:cNvPr id="2" name="Заголовок 1">
             <a:extLst>
               <a:ext uri="{FF2B5EF4-FFF2-40B4-BE49-F238E27FC236}">
-                <a16:creationId xmlns:a16="http://schemas.microsoft.com/office/drawing/2014/main" xmlns="" id="{6C22B635-C41C-402B-1E28-A20462A174A1}"/>
+                <a16:creationId xmlns="" xmlns:a16="http://schemas.microsoft.com/office/drawing/2014/main" id="{6C22B635-C41C-402B-1E28-A20462A174A1}"/>
               </a:ext>
             </a:extLst>
           </p:cNvPr>
@@ -187,7 +187,7 @@
           <p:cNvPr id="3" name="Подзаголовок 2">
             <a:extLst>
               <a:ext uri="{FF2B5EF4-FFF2-40B4-BE49-F238E27FC236}">
-                <a16:creationId xmlns:a16="http://schemas.microsoft.com/office/drawing/2014/main" xmlns="" id="{B02AC16B-F766-9B9D-2C96-F19A5339ED21}"/>
+                <a16:creationId xmlns="" xmlns:a16="http://schemas.microsoft.com/office/drawing/2014/main" id="{B02AC16B-F766-9B9D-2C96-F19A5339ED21}"/>
               </a:ext>
             </a:extLst>
           </p:cNvPr>
@@ -257,7 +257,7 @@
           <p:cNvPr id="4" name="Дата 3">
             <a:extLst>
               <a:ext uri="{FF2B5EF4-FFF2-40B4-BE49-F238E27FC236}">
-                <a16:creationId xmlns:a16="http://schemas.microsoft.com/office/drawing/2014/main" xmlns="" id="{3564968C-17CB-10D3-DED0-4FC410B51D32}"/>
+                <a16:creationId xmlns="" xmlns:a16="http://schemas.microsoft.com/office/drawing/2014/main" id="{3564968C-17CB-10D3-DED0-4FC410B51D32}"/>
               </a:ext>
             </a:extLst>
           </p:cNvPr>
@@ -287,7 +287,7 @@
           <p:cNvPr id="5" name="Нижний колонтитул 4">
             <a:extLst>
               <a:ext uri="{FF2B5EF4-FFF2-40B4-BE49-F238E27FC236}">
-                <a16:creationId xmlns:a16="http://schemas.microsoft.com/office/drawing/2014/main" xmlns="" id="{1DC2DEEA-5493-01FD-53B1-4A5729EDC335}"/>
+                <a16:creationId xmlns="" xmlns:a16="http://schemas.microsoft.com/office/drawing/2014/main" id="{1DC2DEEA-5493-01FD-53B1-4A5729EDC335}"/>
               </a:ext>
             </a:extLst>
           </p:cNvPr>
@@ -312,7 +312,7 @@
           <p:cNvPr id="6" name="Номер слайда 5">
             <a:extLst>
               <a:ext uri="{FF2B5EF4-FFF2-40B4-BE49-F238E27FC236}">
-                <a16:creationId xmlns:a16="http://schemas.microsoft.com/office/drawing/2014/main" xmlns="" id="{0807E570-3FDF-B348-E0F5-CCBCED63EAE6}"/>
+                <a16:creationId xmlns="" xmlns:a16="http://schemas.microsoft.com/office/drawing/2014/main" id="{0807E570-3FDF-B348-E0F5-CCBCED63EAE6}"/>
               </a:ext>
             </a:extLst>
           </p:cNvPr>
@@ -340,7 +340,7 @@
     </p:spTree>
     <p:extLst>
       <p:ext uri="{BB962C8B-B14F-4D97-AF65-F5344CB8AC3E}">
-        <p14:creationId xmlns:p14="http://schemas.microsoft.com/office/powerpoint/2010/main" xmlns="" val="1272996399"/>
+        <p14:creationId xmlns="" xmlns:p14="http://schemas.microsoft.com/office/powerpoint/2010/main" val="1272996399"/>
       </p:ext>
     </p:extLst>
   </p:cSld>
@@ -372,7 +372,7 @@
           <p:cNvPr id="2" name="Заголовок 1">
             <a:extLst>
               <a:ext uri="{FF2B5EF4-FFF2-40B4-BE49-F238E27FC236}">
-                <a16:creationId xmlns:a16="http://schemas.microsoft.com/office/drawing/2014/main" xmlns="" id="{3D62C626-34ED-D7E5-BA8B-683D5145EFE7}"/>
+                <a16:creationId xmlns="" xmlns:a16="http://schemas.microsoft.com/office/drawing/2014/main" id="{3D62C626-34ED-D7E5-BA8B-683D5145EFE7}"/>
               </a:ext>
             </a:extLst>
           </p:cNvPr>
@@ -400,7 +400,7 @@
           <p:cNvPr id="3" name="Вертикальный текст 2">
             <a:extLst>
               <a:ext uri="{FF2B5EF4-FFF2-40B4-BE49-F238E27FC236}">
-                <a16:creationId xmlns:a16="http://schemas.microsoft.com/office/drawing/2014/main" xmlns="" id="{EA7C5908-CA42-DF6A-CA23-3EEBE0EA9DAE}"/>
+                <a16:creationId xmlns="" xmlns:a16="http://schemas.microsoft.com/office/drawing/2014/main" id="{EA7C5908-CA42-DF6A-CA23-3EEBE0EA9DAE}"/>
               </a:ext>
             </a:extLst>
           </p:cNvPr>
@@ -457,7 +457,7 @@
           <p:cNvPr id="4" name="Дата 3">
             <a:extLst>
               <a:ext uri="{FF2B5EF4-FFF2-40B4-BE49-F238E27FC236}">
-                <a16:creationId xmlns:a16="http://schemas.microsoft.com/office/drawing/2014/main" xmlns="" id="{D49BA951-1551-2242-7E66-43B72B23C555}"/>
+                <a16:creationId xmlns="" xmlns:a16="http://schemas.microsoft.com/office/drawing/2014/main" id="{D49BA951-1551-2242-7E66-43B72B23C555}"/>
               </a:ext>
             </a:extLst>
           </p:cNvPr>
@@ -487,7 +487,7 @@
           <p:cNvPr id="5" name="Нижний колонтитул 4">
             <a:extLst>
               <a:ext uri="{FF2B5EF4-FFF2-40B4-BE49-F238E27FC236}">
-                <a16:creationId xmlns:a16="http://schemas.microsoft.com/office/drawing/2014/main" xmlns="" id="{0327622B-C755-17A5-0C0D-9AE8868F3D25}"/>
+                <a16:creationId xmlns="" xmlns:a16="http://schemas.microsoft.com/office/drawing/2014/main" id="{0327622B-C755-17A5-0C0D-9AE8868F3D25}"/>
               </a:ext>
             </a:extLst>
           </p:cNvPr>
@@ -512,7 +512,7 @@
           <p:cNvPr id="6" name="Номер слайда 5">
             <a:extLst>
               <a:ext uri="{FF2B5EF4-FFF2-40B4-BE49-F238E27FC236}">
-                <a16:creationId xmlns:a16="http://schemas.microsoft.com/office/drawing/2014/main" xmlns="" id="{AD9BA474-0163-CCFE-39A7-339A421F6B23}"/>
+                <a16:creationId xmlns="" xmlns:a16="http://schemas.microsoft.com/office/drawing/2014/main" id="{AD9BA474-0163-CCFE-39A7-339A421F6B23}"/>
               </a:ext>
             </a:extLst>
           </p:cNvPr>
@@ -540,7 +540,7 @@
     </p:spTree>
     <p:extLst>
       <p:ext uri="{BB962C8B-B14F-4D97-AF65-F5344CB8AC3E}">
-        <p14:creationId xmlns:p14="http://schemas.microsoft.com/office/powerpoint/2010/main" xmlns="" val="2333714989"/>
+        <p14:creationId xmlns="" xmlns:p14="http://schemas.microsoft.com/office/powerpoint/2010/main" val="2333714989"/>
       </p:ext>
     </p:extLst>
   </p:cSld>
@@ -572,7 +572,7 @@
           <p:cNvPr id="2" name="Вертикальный заголовок 1">
             <a:extLst>
               <a:ext uri="{FF2B5EF4-FFF2-40B4-BE49-F238E27FC236}">
-                <a16:creationId xmlns:a16="http://schemas.microsoft.com/office/drawing/2014/main" xmlns="" id="{E08A5F57-D86D-649A-DC47-7F3F66F05BD9}"/>
+                <a16:creationId xmlns="" xmlns:a16="http://schemas.microsoft.com/office/drawing/2014/main" id="{E08A5F57-D86D-649A-DC47-7F3F66F05BD9}"/>
               </a:ext>
             </a:extLst>
           </p:cNvPr>
@@ -605,7 +605,7 @@
           <p:cNvPr id="3" name="Вертикальный текст 2">
             <a:extLst>
               <a:ext uri="{FF2B5EF4-FFF2-40B4-BE49-F238E27FC236}">
-                <a16:creationId xmlns:a16="http://schemas.microsoft.com/office/drawing/2014/main" xmlns="" id="{8874D2F8-BACD-6E29-3365-5150EC0F469D}"/>
+                <a16:creationId xmlns="" xmlns:a16="http://schemas.microsoft.com/office/drawing/2014/main" id="{8874D2F8-BACD-6E29-3365-5150EC0F469D}"/>
               </a:ext>
             </a:extLst>
           </p:cNvPr>
@@ -667,7 +667,7 @@
           <p:cNvPr id="4" name="Дата 3">
             <a:extLst>
               <a:ext uri="{FF2B5EF4-FFF2-40B4-BE49-F238E27FC236}">
-                <a16:creationId xmlns:a16="http://schemas.microsoft.com/office/drawing/2014/main" xmlns="" id="{D50CC684-F835-01B3-12C3-2BF08424BE9A}"/>
+                <a16:creationId xmlns="" xmlns:a16="http://schemas.microsoft.com/office/drawing/2014/main" id="{D50CC684-F835-01B3-12C3-2BF08424BE9A}"/>
               </a:ext>
             </a:extLst>
           </p:cNvPr>
@@ -697,7 +697,7 @@
           <p:cNvPr id="5" name="Нижний колонтитул 4">
             <a:extLst>
               <a:ext uri="{FF2B5EF4-FFF2-40B4-BE49-F238E27FC236}">
-                <a16:creationId xmlns:a16="http://schemas.microsoft.com/office/drawing/2014/main" xmlns="" id="{4703995C-10CB-91BC-6F95-DD7C2FEACF59}"/>
+                <a16:creationId xmlns="" xmlns:a16="http://schemas.microsoft.com/office/drawing/2014/main" id="{4703995C-10CB-91BC-6F95-DD7C2FEACF59}"/>
               </a:ext>
             </a:extLst>
           </p:cNvPr>
@@ -722,7 +722,7 @@
           <p:cNvPr id="6" name="Номер слайда 5">
             <a:extLst>
               <a:ext uri="{FF2B5EF4-FFF2-40B4-BE49-F238E27FC236}">
-                <a16:creationId xmlns:a16="http://schemas.microsoft.com/office/drawing/2014/main" xmlns="" id="{5257DCA7-9F64-7D24-8074-AEDC4C52246B}"/>
+                <a16:creationId xmlns="" xmlns:a16="http://schemas.microsoft.com/office/drawing/2014/main" id="{5257DCA7-9F64-7D24-8074-AEDC4C52246B}"/>
               </a:ext>
             </a:extLst>
           </p:cNvPr>
@@ -750,7 +750,7 @@
     </p:spTree>
     <p:extLst>
       <p:ext uri="{BB962C8B-B14F-4D97-AF65-F5344CB8AC3E}">
-        <p14:creationId xmlns:p14="http://schemas.microsoft.com/office/powerpoint/2010/main" xmlns="" val="1118870416"/>
+        <p14:creationId xmlns="" xmlns:p14="http://schemas.microsoft.com/office/powerpoint/2010/main" val="1118870416"/>
       </p:ext>
     </p:extLst>
   </p:cSld>
@@ -782,7 +782,7 @@
           <p:cNvPr id="2" name="Заголовок 1">
             <a:extLst>
               <a:ext uri="{FF2B5EF4-FFF2-40B4-BE49-F238E27FC236}">
-                <a16:creationId xmlns:a16="http://schemas.microsoft.com/office/drawing/2014/main" xmlns="" id="{A2A5AD26-E862-68C5-CDCC-393C4C7F1E3F}"/>
+                <a16:creationId xmlns="" xmlns:a16="http://schemas.microsoft.com/office/drawing/2014/main" id="{A2A5AD26-E862-68C5-CDCC-393C4C7F1E3F}"/>
               </a:ext>
             </a:extLst>
           </p:cNvPr>
@@ -810,7 +810,7 @@
           <p:cNvPr id="3" name="Объект 2">
             <a:extLst>
               <a:ext uri="{FF2B5EF4-FFF2-40B4-BE49-F238E27FC236}">
-                <a16:creationId xmlns:a16="http://schemas.microsoft.com/office/drawing/2014/main" xmlns="" id="{03C6F2EB-A556-F281-3A2A-AE2588C6A644}"/>
+                <a16:creationId xmlns="" xmlns:a16="http://schemas.microsoft.com/office/drawing/2014/main" id="{03C6F2EB-A556-F281-3A2A-AE2588C6A644}"/>
               </a:ext>
             </a:extLst>
           </p:cNvPr>
@@ -867,7 +867,7 @@
           <p:cNvPr id="4" name="Дата 3">
             <a:extLst>
               <a:ext uri="{FF2B5EF4-FFF2-40B4-BE49-F238E27FC236}">
-                <a16:creationId xmlns:a16="http://schemas.microsoft.com/office/drawing/2014/main" xmlns="" id="{1C2A680E-98AB-4C8A-CFE2-6FC0DDF8EB38}"/>
+                <a16:creationId xmlns="" xmlns:a16="http://schemas.microsoft.com/office/drawing/2014/main" id="{1C2A680E-98AB-4C8A-CFE2-6FC0DDF8EB38}"/>
               </a:ext>
             </a:extLst>
           </p:cNvPr>
@@ -897,7 +897,7 @@
           <p:cNvPr id="5" name="Нижний колонтитул 4">
             <a:extLst>
               <a:ext uri="{FF2B5EF4-FFF2-40B4-BE49-F238E27FC236}">
-                <a16:creationId xmlns:a16="http://schemas.microsoft.com/office/drawing/2014/main" xmlns="" id="{30266EAA-0892-7F8A-83B3-486C93708114}"/>
+                <a16:creationId xmlns="" xmlns:a16="http://schemas.microsoft.com/office/drawing/2014/main" id="{30266EAA-0892-7F8A-83B3-486C93708114}"/>
               </a:ext>
             </a:extLst>
           </p:cNvPr>
@@ -922,7 +922,7 @@
           <p:cNvPr id="6" name="Номер слайда 5">
             <a:extLst>
               <a:ext uri="{FF2B5EF4-FFF2-40B4-BE49-F238E27FC236}">
-                <a16:creationId xmlns:a16="http://schemas.microsoft.com/office/drawing/2014/main" xmlns="" id="{FF66F2F9-72BB-03CC-8740-B39D09128506}"/>
+                <a16:creationId xmlns="" xmlns:a16="http://schemas.microsoft.com/office/drawing/2014/main" id="{FF66F2F9-72BB-03CC-8740-B39D09128506}"/>
               </a:ext>
             </a:extLst>
           </p:cNvPr>
@@ -950,7 +950,7 @@
     </p:spTree>
     <p:extLst>
       <p:ext uri="{BB962C8B-B14F-4D97-AF65-F5344CB8AC3E}">
-        <p14:creationId xmlns:p14="http://schemas.microsoft.com/office/powerpoint/2010/main" xmlns="" val="2750430054"/>
+        <p14:creationId xmlns="" xmlns:p14="http://schemas.microsoft.com/office/powerpoint/2010/main" val="2750430054"/>
       </p:ext>
     </p:extLst>
   </p:cSld>
@@ -982,7 +982,7 @@
           <p:cNvPr id="2" name="Заголовок 1">
             <a:extLst>
               <a:ext uri="{FF2B5EF4-FFF2-40B4-BE49-F238E27FC236}">
-                <a16:creationId xmlns:a16="http://schemas.microsoft.com/office/drawing/2014/main" xmlns="" id="{5A24959A-1551-F71C-0F0C-A5B62C45786E}"/>
+                <a16:creationId xmlns="" xmlns:a16="http://schemas.microsoft.com/office/drawing/2014/main" id="{5A24959A-1551-F71C-0F0C-A5B62C45786E}"/>
               </a:ext>
             </a:extLst>
           </p:cNvPr>
@@ -1019,7 +1019,7 @@
           <p:cNvPr id="3" name="Текст 2">
             <a:extLst>
               <a:ext uri="{FF2B5EF4-FFF2-40B4-BE49-F238E27FC236}">
-                <a16:creationId xmlns:a16="http://schemas.microsoft.com/office/drawing/2014/main" xmlns="" id="{ADF02DB0-A0E5-0FD5-58DF-49FE54489857}"/>
+                <a16:creationId xmlns="" xmlns:a16="http://schemas.microsoft.com/office/drawing/2014/main" id="{ADF02DB0-A0E5-0FD5-58DF-49FE54489857}"/>
               </a:ext>
             </a:extLst>
           </p:cNvPr>
@@ -1144,7 +1144,7 @@
           <p:cNvPr id="4" name="Дата 3">
             <a:extLst>
               <a:ext uri="{FF2B5EF4-FFF2-40B4-BE49-F238E27FC236}">
-                <a16:creationId xmlns:a16="http://schemas.microsoft.com/office/drawing/2014/main" xmlns="" id="{B31A924D-762F-B9BE-7C66-0F36D5ECF50B}"/>
+                <a16:creationId xmlns="" xmlns:a16="http://schemas.microsoft.com/office/drawing/2014/main" id="{B31A924D-762F-B9BE-7C66-0F36D5ECF50B}"/>
               </a:ext>
             </a:extLst>
           </p:cNvPr>
@@ -1174,7 +1174,7 @@
           <p:cNvPr id="5" name="Нижний колонтитул 4">
             <a:extLst>
               <a:ext uri="{FF2B5EF4-FFF2-40B4-BE49-F238E27FC236}">
-                <a16:creationId xmlns:a16="http://schemas.microsoft.com/office/drawing/2014/main" xmlns="" id="{2630DA3B-3A95-9B22-A74B-574D21ECCE41}"/>
+                <a16:creationId xmlns="" xmlns:a16="http://schemas.microsoft.com/office/drawing/2014/main" id="{2630DA3B-3A95-9B22-A74B-574D21ECCE41}"/>
               </a:ext>
             </a:extLst>
           </p:cNvPr>
@@ -1199,7 +1199,7 @@
           <p:cNvPr id="6" name="Номер слайда 5">
             <a:extLst>
               <a:ext uri="{FF2B5EF4-FFF2-40B4-BE49-F238E27FC236}">
-                <a16:creationId xmlns:a16="http://schemas.microsoft.com/office/drawing/2014/main" xmlns="" id="{EF34E42D-2AC6-0AD7-8AB3-E8BAFA94735F}"/>
+                <a16:creationId xmlns="" xmlns:a16="http://schemas.microsoft.com/office/drawing/2014/main" id="{EF34E42D-2AC6-0AD7-8AB3-E8BAFA94735F}"/>
               </a:ext>
             </a:extLst>
           </p:cNvPr>
@@ -1227,7 +1227,7 @@
     </p:spTree>
     <p:extLst>
       <p:ext uri="{BB962C8B-B14F-4D97-AF65-F5344CB8AC3E}">
-        <p14:creationId xmlns:p14="http://schemas.microsoft.com/office/powerpoint/2010/main" xmlns="" val="2827631494"/>
+        <p14:creationId xmlns="" xmlns:p14="http://schemas.microsoft.com/office/powerpoint/2010/main" val="2827631494"/>
       </p:ext>
     </p:extLst>
   </p:cSld>
@@ -1259,7 +1259,7 @@
           <p:cNvPr id="2" name="Заголовок 1">
             <a:extLst>
               <a:ext uri="{FF2B5EF4-FFF2-40B4-BE49-F238E27FC236}">
-                <a16:creationId xmlns:a16="http://schemas.microsoft.com/office/drawing/2014/main" xmlns="" id="{28A59797-1334-2923-2E97-3871208FE40A}"/>
+                <a16:creationId xmlns="" xmlns:a16="http://schemas.microsoft.com/office/drawing/2014/main" id="{28A59797-1334-2923-2E97-3871208FE40A}"/>
               </a:ext>
             </a:extLst>
           </p:cNvPr>
@@ -1287,7 +1287,7 @@
           <p:cNvPr id="3" name="Объект 2">
             <a:extLst>
               <a:ext uri="{FF2B5EF4-FFF2-40B4-BE49-F238E27FC236}">
-                <a16:creationId xmlns:a16="http://schemas.microsoft.com/office/drawing/2014/main" xmlns="" id="{B404065F-1CA1-F4C0-4148-E4AB8A35C962}"/>
+                <a16:creationId xmlns="" xmlns:a16="http://schemas.microsoft.com/office/drawing/2014/main" id="{B404065F-1CA1-F4C0-4148-E4AB8A35C962}"/>
               </a:ext>
             </a:extLst>
           </p:cNvPr>
@@ -1349,7 +1349,7 @@
           <p:cNvPr id="4" name="Объект 3">
             <a:extLst>
               <a:ext uri="{FF2B5EF4-FFF2-40B4-BE49-F238E27FC236}">
-                <a16:creationId xmlns:a16="http://schemas.microsoft.com/office/drawing/2014/main" xmlns="" id="{18634534-8B6C-984A-62A3-2AFBC1CF0E9F}"/>
+                <a16:creationId xmlns="" xmlns:a16="http://schemas.microsoft.com/office/drawing/2014/main" id="{18634534-8B6C-984A-62A3-2AFBC1CF0E9F}"/>
               </a:ext>
             </a:extLst>
           </p:cNvPr>
@@ -1411,7 +1411,7 @@
           <p:cNvPr id="5" name="Дата 4">
             <a:extLst>
               <a:ext uri="{FF2B5EF4-FFF2-40B4-BE49-F238E27FC236}">
-                <a16:creationId xmlns:a16="http://schemas.microsoft.com/office/drawing/2014/main" xmlns="" id="{6FC44AEE-42FC-515B-3ADE-898A42020072}"/>
+                <a16:creationId xmlns="" xmlns:a16="http://schemas.microsoft.com/office/drawing/2014/main" id="{6FC44AEE-42FC-515B-3ADE-898A42020072}"/>
               </a:ext>
             </a:extLst>
           </p:cNvPr>
@@ -1441,7 +1441,7 @@
           <p:cNvPr id="6" name="Нижний колонтитул 5">
             <a:extLst>
               <a:ext uri="{FF2B5EF4-FFF2-40B4-BE49-F238E27FC236}">
-                <a16:creationId xmlns:a16="http://schemas.microsoft.com/office/drawing/2014/main" xmlns="" id="{E1DE376D-3BBA-E1DD-820A-BCC5C428F1B5}"/>
+                <a16:creationId xmlns="" xmlns:a16="http://schemas.microsoft.com/office/drawing/2014/main" id="{E1DE376D-3BBA-E1DD-820A-BCC5C428F1B5}"/>
               </a:ext>
             </a:extLst>
           </p:cNvPr>
@@ -1466,7 +1466,7 @@
           <p:cNvPr id="7" name="Номер слайда 6">
             <a:extLst>
               <a:ext uri="{FF2B5EF4-FFF2-40B4-BE49-F238E27FC236}">
-                <a16:creationId xmlns:a16="http://schemas.microsoft.com/office/drawing/2014/main" xmlns="" id="{D9FA44BE-1D6E-4AE5-1A8F-55185EFEE085}"/>
+                <a16:creationId xmlns="" xmlns:a16="http://schemas.microsoft.com/office/drawing/2014/main" id="{D9FA44BE-1D6E-4AE5-1A8F-55185EFEE085}"/>
               </a:ext>
             </a:extLst>
           </p:cNvPr>
@@ -1494,7 +1494,7 @@
     </p:spTree>
     <p:extLst>
       <p:ext uri="{BB962C8B-B14F-4D97-AF65-F5344CB8AC3E}">
-        <p14:creationId xmlns:p14="http://schemas.microsoft.com/office/powerpoint/2010/main" xmlns="" val="3010691799"/>
+        <p14:creationId xmlns="" xmlns:p14="http://schemas.microsoft.com/office/powerpoint/2010/main" val="3010691799"/>
       </p:ext>
     </p:extLst>
   </p:cSld>
@@ -1503,7 +1503,7 @@
   </p:clrMapOvr>
   <p:extLst>
     <p:ext uri="{DCECCB84-F9BA-43D5-87BE-67443E8EF086}">
-      <p15:sldGuideLst xmlns:p15="http://schemas.microsoft.com/office/powerpoint/2012/main" xmlns=""/>
+      <p15:sldGuideLst xmlns="" xmlns:p15="http://schemas.microsoft.com/office/powerpoint/2012/main"/>
     </p:ext>
   </p:extLst>
 </p:sldLayout>
@@ -1531,7 +1531,7 @@
           <p:cNvPr id="2" name="Заголовок 1">
             <a:extLst>
               <a:ext uri="{FF2B5EF4-FFF2-40B4-BE49-F238E27FC236}">
-                <a16:creationId xmlns:a16="http://schemas.microsoft.com/office/drawing/2014/main" xmlns="" id="{AD51BA60-F16F-47F9-87F6-D00E24EE9B2B}"/>
+                <a16:creationId xmlns="" xmlns:a16="http://schemas.microsoft.com/office/drawing/2014/main" id="{AD51BA60-F16F-47F9-87F6-D00E24EE9B2B}"/>
               </a:ext>
             </a:extLst>
           </p:cNvPr>
@@ -1564,7 +1564,7 @@
           <p:cNvPr id="3" name="Текст 2">
             <a:extLst>
               <a:ext uri="{FF2B5EF4-FFF2-40B4-BE49-F238E27FC236}">
-                <a16:creationId xmlns:a16="http://schemas.microsoft.com/office/drawing/2014/main" xmlns="" id="{B19BD213-3397-8B09-0723-F85DEB4EB676}"/>
+                <a16:creationId xmlns="" xmlns:a16="http://schemas.microsoft.com/office/drawing/2014/main" id="{B19BD213-3397-8B09-0723-F85DEB4EB676}"/>
               </a:ext>
             </a:extLst>
           </p:cNvPr>
@@ -1635,7 +1635,7 @@
           <p:cNvPr id="4" name="Объект 3">
             <a:extLst>
               <a:ext uri="{FF2B5EF4-FFF2-40B4-BE49-F238E27FC236}">
-                <a16:creationId xmlns:a16="http://schemas.microsoft.com/office/drawing/2014/main" xmlns="" id="{4F90813F-CEE5-81C8-F672-E2888B12978F}"/>
+                <a16:creationId xmlns="" xmlns:a16="http://schemas.microsoft.com/office/drawing/2014/main" id="{4F90813F-CEE5-81C8-F672-E2888B12978F}"/>
               </a:ext>
             </a:extLst>
           </p:cNvPr>
@@ -1697,7 +1697,7 @@
           <p:cNvPr id="5" name="Текст 4">
             <a:extLst>
               <a:ext uri="{FF2B5EF4-FFF2-40B4-BE49-F238E27FC236}">
-                <a16:creationId xmlns:a16="http://schemas.microsoft.com/office/drawing/2014/main" xmlns="" id="{AEB5B3DF-1B9C-1177-E3A7-6325F4C9CDD8}"/>
+                <a16:creationId xmlns="" xmlns:a16="http://schemas.microsoft.com/office/drawing/2014/main" id="{AEB5B3DF-1B9C-1177-E3A7-6325F4C9CDD8}"/>
               </a:ext>
             </a:extLst>
           </p:cNvPr>
@@ -1768,7 +1768,7 @@
           <p:cNvPr id="6" name="Объект 5">
             <a:extLst>
               <a:ext uri="{FF2B5EF4-FFF2-40B4-BE49-F238E27FC236}">
-                <a16:creationId xmlns:a16="http://schemas.microsoft.com/office/drawing/2014/main" xmlns="" id="{F184D90B-F5FA-9EB9-DFB1-93DA150DB976}"/>
+                <a16:creationId xmlns="" xmlns:a16="http://schemas.microsoft.com/office/drawing/2014/main" id="{F184D90B-F5FA-9EB9-DFB1-93DA150DB976}"/>
               </a:ext>
             </a:extLst>
           </p:cNvPr>
@@ -1830,7 +1830,7 @@
           <p:cNvPr id="7" name="Дата 6">
             <a:extLst>
               <a:ext uri="{FF2B5EF4-FFF2-40B4-BE49-F238E27FC236}">
-                <a16:creationId xmlns:a16="http://schemas.microsoft.com/office/drawing/2014/main" xmlns="" id="{4909FD9D-6C64-061F-26DE-6F27DBB1CE19}"/>
+                <a16:creationId xmlns="" xmlns:a16="http://schemas.microsoft.com/office/drawing/2014/main" id="{4909FD9D-6C64-061F-26DE-6F27DBB1CE19}"/>
               </a:ext>
             </a:extLst>
           </p:cNvPr>
@@ -1860,7 +1860,7 @@
           <p:cNvPr id="8" name="Нижний колонтитул 7">
             <a:extLst>
               <a:ext uri="{FF2B5EF4-FFF2-40B4-BE49-F238E27FC236}">
-                <a16:creationId xmlns:a16="http://schemas.microsoft.com/office/drawing/2014/main" xmlns="" id="{C878F4DD-1386-FEB3-0696-6663950E9545}"/>
+                <a16:creationId xmlns="" xmlns:a16="http://schemas.microsoft.com/office/drawing/2014/main" id="{C878F4DD-1386-FEB3-0696-6663950E9545}"/>
               </a:ext>
             </a:extLst>
           </p:cNvPr>
@@ -1885,7 +1885,7 @@
           <p:cNvPr id="9" name="Номер слайда 8">
             <a:extLst>
               <a:ext uri="{FF2B5EF4-FFF2-40B4-BE49-F238E27FC236}">
-                <a16:creationId xmlns:a16="http://schemas.microsoft.com/office/drawing/2014/main" xmlns="" id="{2A8AB781-1370-C6F0-93E0-0DEE60793F0A}"/>
+                <a16:creationId xmlns="" xmlns:a16="http://schemas.microsoft.com/office/drawing/2014/main" id="{2A8AB781-1370-C6F0-93E0-0DEE60793F0A}"/>
               </a:ext>
             </a:extLst>
           </p:cNvPr>
@@ -1913,7 +1913,7 @@
     </p:spTree>
     <p:extLst>
       <p:ext uri="{BB962C8B-B14F-4D97-AF65-F5344CB8AC3E}">
-        <p14:creationId xmlns:p14="http://schemas.microsoft.com/office/powerpoint/2010/main" xmlns="" val="4089792428"/>
+        <p14:creationId xmlns="" xmlns:p14="http://schemas.microsoft.com/office/powerpoint/2010/main" val="4089792428"/>
       </p:ext>
     </p:extLst>
   </p:cSld>
@@ -1922,7 +1922,7 @@
   </p:clrMapOvr>
   <p:extLst>
     <p:ext uri="{DCECCB84-F9BA-43D5-87BE-67443E8EF086}">
-      <p15:sldGuideLst xmlns:p15="http://schemas.microsoft.com/office/powerpoint/2012/main" xmlns=""/>
+      <p15:sldGuideLst xmlns="" xmlns:p15="http://schemas.microsoft.com/office/powerpoint/2012/main"/>
     </p:ext>
   </p:extLst>
 </p:sldLayout>
@@ -1950,7 +1950,7 @@
           <p:cNvPr id="2" name="Заголовок 1">
             <a:extLst>
               <a:ext uri="{FF2B5EF4-FFF2-40B4-BE49-F238E27FC236}">
-                <a16:creationId xmlns:a16="http://schemas.microsoft.com/office/drawing/2014/main" xmlns="" id="{29497852-1C46-E84A-9F06-B150D562F34A}"/>
+                <a16:creationId xmlns="" xmlns:a16="http://schemas.microsoft.com/office/drawing/2014/main" id="{29497852-1C46-E84A-9F06-B150D562F34A}"/>
               </a:ext>
             </a:extLst>
           </p:cNvPr>
@@ -1978,7 +1978,7 @@
           <p:cNvPr id="3" name="Дата 2">
             <a:extLst>
               <a:ext uri="{FF2B5EF4-FFF2-40B4-BE49-F238E27FC236}">
-                <a16:creationId xmlns:a16="http://schemas.microsoft.com/office/drawing/2014/main" xmlns="" id="{A11CC6BF-29D5-5BD9-944A-20E4312B4D89}"/>
+                <a16:creationId xmlns="" xmlns:a16="http://schemas.microsoft.com/office/drawing/2014/main" id="{A11CC6BF-29D5-5BD9-944A-20E4312B4D89}"/>
               </a:ext>
             </a:extLst>
           </p:cNvPr>
@@ -2008,7 +2008,7 @@
           <p:cNvPr id="4" name="Нижний колонтитул 3">
             <a:extLst>
               <a:ext uri="{FF2B5EF4-FFF2-40B4-BE49-F238E27FC236}">
-                <a16:creationId xmlns:a16="http://schemas.microsoft.com/office/drawing/2014/main" xmlns="" id="{19C95E2E-23ED-EDAF-E38C-85674D9F7E44}"/>
+                <a16:creationId xmlns="" xmlns:a16="http://schemas.microsoft.com/office/drawing/2014/main" id="{19C95E2E-23ED-EDAF-E38C-85674D9F7E44}"/>
               </a:ext>
             </a:extLst>
           </p:cNvPr>
@@ -2033,7 +2033,7 @@
           <p:cNvPr id="5" name="Номер слайда 4">
             <a:extLst>
               <a:ext uri="{FF2B5EF4-FFF2-40B4-BE49-F238E27FC236}">
-                <a16:creationId xmlns:a16="http://schemas.microsoft.com/office/drawing/2014/main" xmlns="" id="{D8F7AC30-5F32-F1BB-A868-CC6D8DF3821D}"/>
+                <a16:creationId xmlns="" xmlns:a16="http://schemas.microsoft.com/office/drawing/2014/main" id="{D8F7AC30-5F32-F1BB-A868-CC6D8DF3821D}"/>
               </a:ext>
             </a:extLst>
           </p:cNvPr>
@@ -2061,7 +2061,7 @@
     </p:spTree>
     <p:extLst>
       <p:ext uri="{BB962C8B-B14F-4D97-AF65-F5344CB8AC3E}">
-        <p14:creationId xmlns:p14="http://schemas.microsoft.com/office/powerpoint/2010/main" xmlns="" val="4081784101"/>
+        <p14:creationId xmlns="" xmlns:p14="http://schemas.microsoft.com/office/powerpoint/2010/main" val="4081784101"/>
       </p:ext>
     </p:extLst>
   </p:cSld>
@@ -2093,7 +2093,7 @@
           <p:cNvPr id="2" name="Дата 1">
             <a:extLst>
               <a:ext uri="{FF2B5EF4-FFF2-40B4-BE49-F238E27FC236}">
-                <a16:creationId xmlns:a16="http://schemas.microsoft.com/office/drawing/2014/main" xmlns="" id="{C80ECC06-8FF6-A260-256F-391F0210AB55}"/>
+                <a16:creationId xmlns="" xmlns:a16="http://schemas.microsoft.com/office/drawing/2014/main" id="{C80ECC06-8FF6-A260-256F-391F0210AB55}"/>
               </a:ext>
             </a:extLst>
           </p:cNvPr>
@@ -2123,7 +2123,7 @@
           <p:cNvPr id="3" name="Нижний колонтитул 2">
             <a:extLst>
               <a:ext uri="{FF2B5EF4-FFF2-40B4-BE49-F238E27FC236}">
-                <a16:creationId xmlns:a16="http://schemas.microsoft.com/office/drawing/2014/main" xmlns="" id="{0DCFDABC-E5FE-9595-7711-37C660C4979A}"/>
+                <a16:creationId xmlns="" xmlns:a16="http://schemas.microsoft.com/office/drawing/2014/main" id="{0DCFDABC-E5FE-9595-7711-37C660C4979A}"/>
               </a:ext>
             </a:extLst>
           </p:cNvPr>
@@ -2148,7 +2148,7 @@
           <p:cNvPr id="4" name="Номер слайда 3">
             <a:extLst>
               <a:ext uri="{FF2B5EF4-FFF2-40B4-BE49-F238E27FC236}">
-                <a16:creationId xmlns:a16="http://schemas.microsoft.com/office/drawing/2014/main" xmlns="" id="{D0989745-DE6D-9785-A762-9B00AC6675E8}"/>
+                <a16:creationId xmlns="" xmlns:a16="http://schemas.microsoft.com/office/drawing/2014/main" id="{D0989745-DE6D-9785-A762-9B00AC6675E8}"/>
               </a:ext>
             </a:extLst>
           </p:cNvPr>
@@ -2176,7 +2176,7 @@
     </p:spTree>
     <p:extLst>
       <p:ext uri="{BB962C8B-B14F-4D97-AF65-F5344CB8AC3E}">
-        <p14:creationId xmlns:p14="http://schemas.microsoft.com/office/powerpoint/2010/main" xmlns="" val="2589094630"/>
+        <p14:creationId xmlns="" xmlns:p14="http://schemas.microsoft.com/office/powerpoint/2010/main" val="2589094630"/>
       </p:ext>
     </p:extLst>
   </p:cSld>
@@ -2208,7 +2208,7 @@
           <p:cNvPr id="2" name="Заголовок 1">
             <a:extLst>
               <a:ext uri="{FF2B5EF4-FFF2-40B4-BE49-F238E27FC236}">
-                <a16:creationId xmlns:a16="http://schemas.microsoft.com/office/drawing/2014/main" xmlns="" id="{A2AAB1B6-40ED-679E-DF23-3E310CA3AE04}"/>
+                <a16:creationId xmlns="" xmlns:a16="http://schemas.microsoft.com/office/drawing/2014/main" id="{A2AAB1B6-40ED-679E-DF23-3E310CA3AE04}"/>
               </a:ext>
             </a:extLst>
           </p:cNvPr>
@@ -2245,7 +2245,7 @@
           <p:cNvPr id="3" name="Объект 2">
             <a:extLst>
               <a:ext uri="{FF2B5EF4-FFF2-40B4-BE49-F238E27FC236}">
-                <a16:creationId xmlns:a16="http://schemas.microsoft.com/office/drawing/2014/main" xmlns="" id="{261A3FC5-1CD1-C641-2552-09DA43F95E0D}"/>
+                <a16:creationId xmlns="" xmlns:a16="http://schemas.microsoft.com/office/drawing/2014/main" id="{261A3FC5-1CD1-C641-2552-09DA43F95E0D}"/>
               </a:ext>
             </a:extLst>
           </p:cNvPr>
@@ -2335,7 +2335,7 @@
           <p:cNvPr id="4" name="Текст 3">
             <a:extLst>
               <a:ext uri="{FF2B5EF4-FFF2-40B4-BE49-F238E27FC236}">
-                <a16:creationId xmlns:a16="http://schemas.microsoft.com/office/drawing/2014/main" xmlns="" id="{94D6D6E6-BFF5-D0C5-3354-9092D54F7384}"/>
+                <a16:creationId xmlns="" xmlns:a16="http://schemas.microsoft.com/office/drawing/2014/main" id="{94D6D6E6-BFF5-D0C5-3354-9092D54F7384}"/>
               </a:ext>
             </a:extLst>
           </p:cNvPr>
@@ -2406,7 +2406,7 @@
           <p:cNvPr id="5" name="Дата 4">
             <a:extLst>
               <a:ext uri="{FF2B5EF4-FFF2-40B4-BE49-F238E27FC236}">
-                <a16:creationId xmlns:a16="http://schemas.microsoft.com/office/drawing/2014/main" xmlns="" id="{C654B115-15EF-DC7F-A719-DAE1108426CD}"/>
+                <a16:creationId xmlns="" xmlns:a16="http://schemas.microsoft.com/office/drawing/2014/main" id="{C654B115-15EF-DC7F-A719-DAE1108426CD}"/>
               </a:ext>
             </a:extLst>
           </p:cNvPr>
@@ -2436,7 +2436,7 @@
           <p:cNvPr id="6" name="Нижний колонтитул 5">
             <a:extLst>
               <a:ext uri="{FF2B5EF4-FFF2-40B4-BE49-F238E27FC236}">
-                <a16:creationId xmlns:a16="http://schemas.microsoft.com/office/drawing/2014/main" xmlns="" id="{BDF4F9EA-17D8-9FE7-5DF0-ED8F8BCD1F9C}"/>
+                <a16:creationId xmlns="" xmlns:a16="http://schemas.microsoft.com/office/drawing/2014/main" id="{BDF4F9EA-17D8-9FE7-5DF0-ED8F8BCD1F9C}"/>
               </a:ext>
             </a:extLst>
           </p:cNvPr>
@@ -2461,7 +2461,7 @@
           <p:cNvPr id="7" name="Номер слайда 6">
             <a:extLst>
               <a:ext uri="{FF2B5EF4-FFF2-40B4-BE49-F238E27FC236}">
-                <a16:creationId xmlns:a16="http://schemas.microsoft.com/office/drawing/2014/main" xmlns="" id="{1AD43746-F6BA-472C-1891-5CD0B2077210}"/>
+                <a16:creationId xmlns="" xmlns:a16="http://schemas.microsoft.com/office/drawing/2014/main" id="{1AD43746-F6BA-472C-1891-5CD0B2077210}"/>
               </a:ext>
             </a:extLst>
           </p:cNvPr>
@@ -2489,7 +2489,7 @@
     </p:spTree>
     <p:extLst>
       <p:ext uri="{BB962C8B-B14F-4D97-AF65-F5344CB8AC3E}">
-        <p14:creationId xmlns:p14="http://schemas.microsoft.com/office/powerpoint/2010/main" xmlns="" val="3804844935"/>
+        <p14:creationId xmlns="" xmlns:p14="http://schemas.microsoft.com/office/powerpoint/2010/main" val="3804844935"/>
       </p:ext>
     </p:extLst>
   </p:cSld>
@@ -2498,7 +2498,7 @@
   </p:clrMapOvr>
   <p:extLst>
     <p:ext uri="{DCECCB84-F9BA-43D5-87BE-67443E8EF086}">
-      <p15:sldGuideLst xmlns:p15="http://schemas.microsoft.com/office/powerpoint/2012/main" xmlns=""/>
+      <p15:sldGuideLst xmlns="" xmlns:p15="http://schemas.microsoft.com/office/powerpoint/2012/main"/>
     </p:ext>
   </p:extLst>
 </p:sldLayout>
@@ -2526,7 +2526,7 @@
           <p:cNvPr id="2" name="Заголовок 1">
             <a:extLst>
               <a:ext uri="{FF2B5EF4-FFF2-40B4-BE49-F238E27FC236}">
-                <a16:creationId xmlns:a16="http://schemas.microsoft.com/office/drawing/2014/main" xmlns="" id="{BC5E5765-06C3-F55F-CE69-39E1818191FB}"/>
+                <a16:creationId xmlns="" xmlns:a16="http://schemas.microsoft.com/office/drawing/2014/main" id="{BC5E5765-06C3-F55F-CE69-39E1818191FB}"/>
               </a:ext>
             </a:extLst>
           </p:cNvPr>
@@ -2563,7 +2563,7 @@
           <p:cNvPr id="3" name="Рисунок 2">
             <a:extLst>
               <a:ext uri="{FF2B5EF4-FFF2-40B4-BE49-F238E27FC236}">
-                <a16:creationId xmlns:a16="http://schemas.microsoft.com/office/drawing/2014/main" xmlns="" id="{60D9ADE1-FC84-39FD-7EAF-077E4FE07F7E}"/>
+                <a16:creationId xmlns="" xmlns:a16="http://schemas.microsoft.com/office/drawing/2014/main" id="{60D9ADE1-FC84-39FD-7EAF-077E4FE07F7E}"/>
               </a:ext>
             </a:extLst>
           </p:cNvPr>
@@ -2630,7 +2630,7 @@
           <p:cNvPr id="4" name="Текст 3">
             <a:extLst>
               <a:ext uri="{FF2B5EF4-FFF2-40B4-BE49-F238E27FC236}">
-                <a16:creationId xmlns:a16="http://schemas.microsoft.com/office/drawing/2014/main" xmlns="" id="{294B9811-C732-CE6F-E9DF-71359FAFCF60}"/>
+                <a16:creationId xmlns="" xmlns:a16="http://schemas.microsoft.com/office/drawing/2014/main" id="{294B9811-C732-CE6F-E9DF-71359FAFCF60}"/>
               </a:ext>
             </a:extLst>
           </p:cNvPr>
@@ -2701,7 +2701,7 @@
           <p:cNvPr id="5" name="Дата 4">
             <a:extLst>
               <a:ext uri="{FF2B5EF4-FFF2-40B4-BE49-F238E27FC236}">
-                <a16:creationId xmlns:a16="http://schemas.microsoft.com/office/drawing/2014/main" xmlns="" id="{43ADBEC5-D36F-8C0E-AD83-5AF3C25420D4}"/>
+                <a16:creationId xmlns="" xmlns:a16="http://schemas.microsoft.com/office/drawing/2014/main" id="{43ADBEC5-D36F-8C0E-AD83-5AF3C25420D4}"/>
               </a:ext>
             </a:extLst>
           </p:cNvPr>
@@ -2731,7 +2731,7 @@
           <p:cNvPr id="6" name="Нижний колонтитул 5">
             <a:extLst>
               <a:ext uri="{FF2B5EF4-FFF2-40B4-BE49-F238E27FC236}">
-                <a16:creationId xmlns:a16="http://schemas.microsoft.com/office/drawing/2014/main" xmlns="" id="{D7B34CA4-05E0-D3E3-75E9-CE9B487AAB38}"/>
+                <a16:creationId xmlns="" xmlns:a16="http://schemas.microsoft.com/office/drawing/2014/main" id="{D7B34CA4-05E0-D3E3-75E9-CE9B487AAB38}"/>
               </a:ext>
             </a:extLst>
           </p:cNvPr>
@@ -2756,7 +2756,7 @@
           <p:cNvPr id="7" name="Номер слайда 6">
             <a:extLst>
               <a:ext uri="{FF2B5EF4-FFF2-40B4-BE49-F238E27FC236}">
-                <a16:creationId xmlns:a16="http://schemas.microsoft.com/office/drawing/2014/main" xmlns="" id="{B4FA9356-70E4-F890-57C9-6179BC49B5BC}"/>
+                <a16:creationId xmlns="" xmlns:a16="http://schemas.microsoft.com/office/drawing/2014/main" id="{B4FA9356-70E4-F890-57C9-6179BC49B5BC}"/>
               </a:ext>
             </a:extLst>
           </p:cNvPr>
@@ -2784,7 +2784,7 @@
     </p:spTree>
     <p:extLst>
       <p:ext uri="{BB962C8B-B14F-4D97-AF65-F5344CB8AC3E}">
-        <p14:creationId xmlns:p14="http://schemas.microsoft.com/office/powerpoint/2010/main" xmlns="" val="4071092918"/>
+        <p14:creationId xmlns="" xmlns:p14="http://schemas.microsoft.com/office/powerpoint/2010/main" val="4071092918"/>
       </p:ext>
     </p:extLst>
   </p:cSld>
@@ -2821,7 +2821,7 @@
           <p:cNvPr id="2" name="Заголовок 1">
             <a:extLst>
               <a:ext uri="{FF2B5EF4-FFF2-40B4-BE49-F238E27FC236}">
-                <a16:creationId xmlns:a16="http://schemas.microsoft.com/office/drawing/2014/main" xmlns="" id="{FBE38DD5-E45E-C23E-DA98-95B5D6DE6372}"/>
+                <a16:creationId xmlns="" xmlns:a16="http://schemas.microsoft.com/office/drawing/2014/main" id="{FBE38DD5-E45E-C23E-DA98-95B5D6DE6372}"/>
               </a:ext>
             </a:extLst>
           </p:cNvPr>
@@ -2859,7 +2859,7 @@
           <p:cNvPr id="3" name="Текст 2">
             <a:extLst>
               <a:ext uri="{FF2B5EF4-FFF2-40B4-BE49-F238E27FC236}">
-                <a16:creationId xmlns:a16="http://schemas.microsoft.com/office/drawing/2014/main" xmlns="" id="{35569B60-B192-8DB5-ABF3-29FF92FEA944}"/>
+                <a16:creationId xmlns="" xmlns:a16="http://schemas.microsoft.com/office/drawing/2014/main" id="{35569B60-B192-8DB5-ABF3-29FF92FEA944}"/>
               </a:ext>
             </a:extLst>
           </p:cNvPr>
@@ -2926,7 +2926,7 @@
           <p:cNvPr id="4" name="Дата 3">
             <a:extLst>
               <a:ext uri="{FF2B5EF4-FFF2-40B4-BE49-F238E27FC236}">
-                <a16:creationId xmlns:a16="http://schemas.microsoft.com/office/drawing/2014/main" xmlns="" id="{C57C4476-4FC0-135C-D6C7-EBA14030188B}"/>
+                <a16:creationId xmlns="" xmlns:a16="http://schemas.microsoft.com/office/drawing/2014/main" id="{C57C4476-4FC0-135C-D6C7-EBA14030188B}"/>
               </a:ext>
             </a:extLst>
           </p:cNvPr>
@@ -2974,7 +2974,7 @@
           <p:cNvPr id="5" name="Нижний колонтитул 4">
             <a:extLst>
               <a:ext uri="{FF2B5EF4-FFF2-40B4-BE49-F238E27FC236}">
-                <a16:creationId xmlns:a16="http://schemas.microsoft.com/office/drawing/2014/main" xmlns="" id="{BFF81529-A902-35D9-E3E1-1053FF5F101C}"/>
+                <a16:creationId xmlns="" xmlns:a16="http://schemas.microsoft.com/office/drawing/2014/main" id="{BFF81529-A902-35D9-E3E1-1053FF5F101C}"/>
               </a:ext>
             </a:extLst>
           </p:cNvPr>
@@ -3017,7 +3017,7 @@
           <p:cNvPr id="6" name="Номер слайда 5">
             <a:extLst>
               <a:ext uri="{FF2B5EF4-FFF2-40B4-BE49-F238E27FC236}">
-                <a16:creationId xmlns:a16="http://schemas.microsoft.com/office/drawing/2014/main" xmlns="" id="{ACD1EBE4-6915-C638-ADC1-AD25DF8169E8}"/>
+                <a16:creationId xmlns="" xmlns:a16="http://schemas.microsoft.com/office/drawing/2014/main" id="{ACD1EBE4-6915-C638-ADC1-AD25DF8169E8}"/>
               </a:ext>
             </a:extLst>
           </p:cNvPr>
@@ -3063,7 +3063,7 @@
     </p:spTree>
     <p:extLst>
       <p:ext uri="{BB962C8B-B14F-4D97-AF65-F5344CB8AC3E}">
-        <p14:creationId xmlns:p14="http://schemas.microsoft.com/office/powerpoint/2010/main" xmlns="" val="729688240"/>
+        <p14:creationId xmlns="" xmlns:p14="http://schemas.microsoft.com/office/powerpoint/2010/main" val="729688240"/>
       </p:ext>
     </p:extLst>
   </p:cSld>
@@ -3364,7 +3364,7 @@
   </p:txStyles>
   <p:extLst>
     <p:ext uri="{27BBF7A9-308A-43DC-89C8-2F10F3537804}">
-      <p15:sldGuideLst xmlns:p15="http://schemas.microsoft.com/office/powerpoint/2012/main" xmlns=""/>
+      <p15:sldGuideLst xmlns="" xmlns:p15="http://schemas.microsoft.com/office/powerpoint/2012/main"/>
     </p:ext>
   </p:extLst>
 </p:sldMaster>
@@ -3565,7 +3565,7 @@
           <p:nvPr>
             <p:extLst>
               <p:ext uri="{D42A27DB-BD31-4B8C-83A1-F6EECF244321}">
-                <p14:modId xmlns:p14="http://schemas.microsoft.com/office/powerpoint/2010/main" xmlns="" val="764121061"/>
+                <p14:modId xmlns="" xmlns:p14="http://schemas.microsoft.com/office/powerpoint/2010/main" val="764121061"/>
               </p:ext>
             </p:extLst>
           </p:nvPr>
@@ -3584,14 +3584,14 @@
                 <a:gridCol w="5793126">
                   <a:extLst>
                     <a:ext uri="{9D8B030D-6E8A-4147-A177-3AD203B41FA5}">
-                      <a16:colId xmlns:a16="http://schemas.microsoft.com/office/drawing/2014/main" xmlns="" val="856406293"/>
+                      <a16:colId xmlns="" xmlns:a16="http://schemas.microsoft.com/office/drawing/2014/main" val="856406293"/>
                     </a:ext>
                   </a:extLst>
                 </a:gridCol>
                 <a:gridCol w="5344334">
                   <a:extLst>
                     <a:ext uri="{9D8B030D-6E8A-4147-A177-3AD203B41FA5}">
-                      <a16:colId xmlns:a16="http://schemas.microsoft.com/office/drawing/2014/main" xmlns="" val="3577592057"/>
+                      <a16:colId xmlns="" xmlns:a16="http://schemas.microsoft.com/office/drawing/2014/main" val="3577592057"/>
                     </a:ext>
                   </a:extLst>
                 </a:gridCol>
@@ -3718,7 +3718,7 @@
                 </a:tc>
                 <a:extLst>
                   <a:ext uri="{0D108BD9-81ED-4DB2-BD59-A6C34878D82A}">
-                    <a16:rowId xmlns:a16="http://schemas.microsoft.com/office/drawing/2014/main" xmlns="" val="3476427313"/>
+                    <a16:rowId xmlns="" xmlns:a16="http://schemas.microsoft.com/office/drawing/2014/main" val="3476427313"/>
                   </a:ext>
                 </a:extLst>
               </a:tr>
@@ -3785,7 +3785,7 @@
     </p:spTree>
     <p:extLst>
       <p:ext uri="{BB962C8B-B14F-4D97-AF65-F5344CB8AC3E}">
-        <p14:creationId xmlns:p14="http://schemas.microsoft.com/office/powerpoint/2010/main" xmlns="" val="4290534139"/>
+        <p14:creationId xmlns="" xmlns:p14="http://schemas.microsoft.com/office/powerpoint/2010/main" val="4290534139"/>
       </p:ext>
     </p:extLst>
   </p:cSld>
@@ -3975,7 +3975,7 @@
     </p:spTree>
     <p:extLst>
       <p:ext uri="{BB962C8B-B14F-4D97-AF65-F5344CB8AC3E}">
-        <p14:creationId xmlns:p14="http://schemas.microsoft.com/office/powerpoint/2010/main" xmlns="" val="3950111895"/>
+        <p14:creationId xmlns="" xmlns:p14="http://schemas.microsoft.com/office/powerpoint/2010/main" val="3950111895"/>
       </p:ext>
     </p:extLst>
   </p:cSld>
@@ -4084,7 +4084,7 @@
     </p:spTree>
     <p:extLst>
       <p:ext uri="{BB962C8B-B14F-4D97-AF65-F5344CB8AC3E}">
-        <p14:creationId xmlns:p14="http://schemas.microsoft.com/office/powerpoint/2010/main" xmlns="" val="4271465794"/>
+        <p14:creationId xmlns="" xmlns:p14="http://schemas.microsoft.com/office/powerpoint/2010/main" val="4271465794"/>
       </p:ext>
     </p:extLst>
   </p:cSld>
@@ -4250,7 +4250,7 @@
     </p:spTree>
     <p:extLst>
       <p:ext uri="{BB962C8B-B14F-4D97-AF65-F5344CB8AC3E}">
-        <p14:creationId xmlns:p14="http://schemas.microsoft.com/office/powerpoint/2010/main" xmlns="" val="3950111895"/>
+        <p14:creationId xmlns="" xmlns:p14="http://schemas.microsoft.com/office/powerpoint/2010/main" val="3950111895"/>
       </p:ext>
     </p:extLst>
   </p:cSld>
@@ -4381,14 +4381,7 @@
                 <a:latin typeface="Times New Roman" pitchFamily="18" charset="0"/>
                 <a:cs typeface="Times New Roman" pitchFamily="18" charset="0"/>
               </a:rPr>
-              <a:t>библиотека для создания экрана-заставки с плавным переходом к основному </a:t>
-            </a:r>
-            <a:r>
-              <a:rPr lang="ru-RU" sz="2000" dirty="0" smtClean="0">
-                <a:latin typeface="Times New Roman" pitchFamily="18" charset="0"/>
-                <a:cs typeface="Times New Roman" pitchFamily="18" charset="0"/>
-              </a:rPr>
-              <a:t>приложению.</a:t>
+              <a:t>библиотека для создания экрана-заставки с плавным переходом к основному приложению.</a:t>
             </a:r>
           </a:p>
           <a:p>
@@ -4408,14 +4401,7 @@
                 <a:latin typeface="Times New Roman" pitchFamily="18" charset="0"/>
                 <a:cs typeface="Times New Roman" pitchFamily="18" charset="0"/>
               </a:rPr>
-              <a:t>Core </a:t>
-            </a:r>
-            <a:r>
-              <a:rPr lang="en-US" sz="2000" b="1" dirty="0" smtClean="0">
-                <a:latin typeface="Times New Roman" pitchFamily="18" charset="0"/>
-                <a:cs typeface="Times New Roman" pitchFamily="18" charset="0"/>
-              </a:rPr>
-              <a:t>KTX</a:t>
+              <a:t>Core KTX</a:t>
             </a:r>
             <a:r>
               <a:rPr lang="en-US" sz="2000" dirty="0" smtClean="0">
@@ -4457,14 +4443,7 @@
                 <a:latin typeface="Times New Roman" pitchFamily="18" charset="0"/>
                 <a:cs typeface="Times New Roman" pitchFamily="18" charset="0"/>
               </a:rPr>
-              <a:t>Android </a:t>
-            </a:r>
-            <a:r>
-              <a:rPr lang="en-US" sz="2000" dirty="0" smtClean="0">
-                <a:latin typeface="Times New Roman" pitchFamily="18" charset="0"/>
-                <a:cs typeface="Times New Roman" pitchFamily="18" charset="0"/>
-              </a:rPr>
-              <a:t>API.</a:t>
+              <a:t>Android API.</a:t>
             </a:r>
             <a:endParaRPr lang="ru-RU" sz="2000" dirty="0" smtClean="0">
               <a:latin typeface="Times New Roman" pitchFamily="18" charset="0"/>
@@ -4550,14 +4529,7 @@
                 <a:latin typeface="Times New Roman" pitchFamily="18" charset="0"/>
                 <a:cs typeface="Times New Roman" pitchFamily="18" charset="0"/>
               </a:rPr>
-              <a:t>Activity </a:t>
-            </a:r>
-            <a:r>
-              <a:rPr lang="en-US" sz="2000" b="1" dirty="0" smtClean="0">
-                <a:latin typeface="Times New Roman" pitchFamily="18" charset="0"/>
-                <a:cs typeface="Times New Roman" pitchFamily="18" charset="0"/>
-              </a:rPr>
-              <a:t>Compose</a:t>
+              <a:t>Activity Compose</a:t>
             </a:r>
             <a:r>
               <a:rPr lang="en-US" sz="2000" dirty="0" smtClean="0">
@@ -4644,14 +4616,7 @@
                 <a:latin typeface="Times New Roman" pitchFamily="18" charset="0"/>
                 <a:cs typeface="Times New Roman" pitchFamily="18" charset="0"/>
               </a:rPr>
-              <a:t>Compose </a:t>
-            </a:r>
-            <a:r>
-              <a:rPr lang="en-US" sz="2000" b="1" dirty="0" smtClean="0">
-                <a:latin typeface="Times New Roman" pitchFamily="18" charset="0"/>
-                <a:cs typeface="Times New Roman" pitchFamily="18" charset="0"/>
-              </a:rPr>
-              <a:t>BOM</a:t>
+              <a:t>Compose BOM</a:t>
             </a:r>
             <a:r>
               <a:rPr lang="en-US" sz="2000" dirty="0" smtClean="0">
@@ -4696,14 +4661,7 @@
                 <a:latin typeface="Times New Roman" pitchFamily="18" charset="0"/>
                 <a:cs typeface="Times New Roman" pitchFamily="18" charset="0"/>
               </a:rPr>
-              <a:t>Compose </a:t>
-            </a:r>
-            <a:r>
-              <a:rPr lang="en-US" sz="2000" b="1" dirty="0" smtClean="0">
-                <a:latin typeface="Times New Roman" pitchFamily="18" charset="0"/>
-                <a:cs typeface="Times New Roman" pitchFamily="18" charset="0"/>
-              </a:rPr>
-              <a:t>UI</a:t>
+              <a:t>Compose UI</a:t>
             </a:r>
             <a:r>
               <a:rPr lang="en-US" sz="2000" dirty="0" smtClean="0">
@@ -4731,14 +4689,7 @@
                 <a:latin typeface="Times New Roman" pitchFamily="18" charset="0"/>
                 <a:cs typeface="Times New Roman" pitchFamily="18" charset="0"/>
               </a:rPr>
-              <a:t> для декларативного построения пользовательского </a:t>
-            </a:r>
-            <a:r>
-              <a:rPr lang="ru-RU" sz="2000" dirty="0" smtClean="0">
-                <a:latin typeface="Times New Roman" pitchFamily="18" charset="0"/>
-                <a:cs typeface="Times New Roman" pitchFamily="18" charset="0"/>
-              </a:rPr>
-              <a:t>интерфейса.</a:t>
+              <a:t> для декларативного построения пользовательского интерфейса.</a:t>
             </a:r>
           </a:p>
           <a:p>
@@ -4817,14 +4768,7 @@
                 <a:latin typeface="Times New Roman" pitchFamily="18" charset="0"/>
                 <a:cs typeface="Times New Roman" pitchFamily="18" charset="0"/>
               </a:rPr>
-              <a:t>Material </a:t>
-            </a:r>
-            <a:r>
-              <a:rPr lang="en-US" sz="2000" b="1" dirty="0" smtClean="0">
-                <a:latin typeface="Times New Roman" pitchFamily="18" charset="0"/>
-                <a:cs typeface="Times New Roman" pitchFamily="18" charset="0"/>
-              </a:rPr>
-              <a:t>Icons Extended</a:t>
+              <a:t>Material Icons Extended</a:t>
             </a:r>
             <a:r>
               <a:rPr lang="en-US" sz="2000" dirty="0" smtClean="0">
@@ -5016,7 +4960,7 @@
     </p:spTree>
     <p:extLst>
       <p:ext uri="{BB962C8B-B14F-4D97-AF65-F5344CB8AC3E}">
-        <p14:creationId xmlns:p14="http://schemas.microsoft.com/office/powerpoint/2010/main" xmlns="" val="3950111895"/>
+        <p14:creationId xmlns="" xmlns:p14="http://schemas.microsoft.com/office/powerpoint/2010/main" val="3950111895"/>
       </p:ext>
     </p:extLst>
   </p:cSld>
@@ -5228,7 +5172,7 @@
           <p:nvPr>
             <p:extLst>
               <p:ext uri="{D42A27DB-BD31-4B8C-83A1-F6EECF244321}">
-                <p14:modId xmlns:p14="http://schemas.microsoft.com/office/powerpoint/2010/main" xmlns="" val="2626662373"/>
+                <p14:modId xmlns="" xmlns:p14="http://schemas.microsoft.com/office/powerpoint/2010/main" val="2626662373"/>
               </p:ext>
             </p:extLst>
           </p:nvPr>
@@ -5247,14 +5191,14 @@
                 <a:gridCol w="5577765">
                   <a:extLst>
                     <a:ext uri="{9D8B030D-6E8A-4147-A177-3AD203B41FA5}">
-                      <a16:colId xmlns:a16="http://schemas.microsoft.com/office/drawing/2014/main" xmlns="" val="856406293"/>
+                      <a16:colId xmlns="" xmlns:a16="http://schemas.microsoft.com/office/drawing/2014/main" val="856406293"/>
                     </a:ext>
                   </a:extLst>
                 </a:gridCol>
                 <a:gridCol w="5145654">
                   <a:extLst>
                     <a:ext uri="{9D8B030D-6E8A-4147-A177-3AD203B41FA5}">
-                      <a16:colId xmlns:a16="http://schemas.microsoft.com/office/drawing/2014/main" xmlns="" val="3577592057"/>
+                      <a16:colId xmlns="" xmlns:a16="http://schemas.microsoft.com/office/drawing/2014/main" val="3577592057"/>
                     </a:ext>
                   </a:extLst>
                 </a:gridCol>
@@ -5381,7 +5325,7 @@
                 </a:tc>
                 <a:extLst>
                   <a:ext uri="{0D108BD9-81ED-4DB2-BD59-A6C34878D82A}">
-                    <a16:rowId xmlns:a16="http://schemas.microsoft.com/office/drawing/2014/main" xmlns="" val="3476427313"/>
+                    <a16:rowId xmlns="" xmlns:a16="http://schemas.microsoft.com/office/drawing/2014/main" val="3476427313"/>
                   </a:ext>
                 </a:extLst>
               </a:tr>
@@ -5445,39 +5389,10 @@
           </a:p>
         </p:txBody>
       </p:sp>
-      <p:sp>
-        <p:nvSpPr>
-          <p:cNvPr id="8" name="Прямоугольник 7"/>
-          <p:cNvSpPr/>
-          <p:nvPr/>
-        </p:nvSpPr>
-        <p:spPr>
-          <a:xfrm>
-            <a:off x="4692891" y="3244334"/>
-            <a:ext cx="2806217" cy="369332"/>
-          </a:xfrm>
-          <a:prstGeom prst="rect">
-            <a:avLst/>
-          </a:prstGeom>
-        </p:spPr>
-        <p:txBody>
-          <a:bodyPr wrap="none">
-            <a:spAutoFit/>
-          </a:bodyPr>
-          <a:lstStyle/>
-          <a:p>
-            <a:r>
-              <a:rPr lang="ru-RU" dirty="0" smtClean="0"/>
-              <a:t>архитектурные решения</a:t>
-            </a:r>
-            <a:endParaRPr lang="ru-RU" dirty="0"/>
-          </a:p>
-        </p:txBody>
-      </p:sp>
     </p:spTree>
     <p:extLst>
       <p:ext uri="{BB962C8B-B14F-4D97-AF65-F5344CB8AC3E}">
-        <p14:creationId xmlns:p14="http://schemas.microsoft.com/office/powerpoint/2010/main" xmlns="" val="4290534139"/>
+        <p14:creationId xmlns="" xmlns:p14="http://schemas.microsoft.com/office/powerpoint/2010/main" val="4290534139"/>
       </p:ext>
     </p:extLst>
   </p:cSld>
@@ -5803,7 +5718,7 @@
   <a:extraClrSchemeLst/>
   <a:extLst>
     <a:ext uri="{05A4C25C-085E-4340-85A3-A5531E510DB2}">
-      <thm15:themeFamily xmlns:thm15="http://schemas.microsoft.com/office/thememl/2012/main" xmlns="" name="Office Theme" id="{2E142A2C-CD16-42D6-873A-C26D2A0506FA}" vid="{1BDDFF52-6CD6-40A5-AB3C-68EB2F1E4D0A}"/>
+      <thm15:themeFamily xmlns="" xmlns:thm15="http://schemas.microsoft.com/office/thememl/2012/main" name="Office Theme" id="{2E142A2C-CD16-42D6-873A-C26D2A0506FA}" vid="{1BDDFF52-6CD6-40A5-AB3C-68EB2F1E4D0A}"/>
     </a:ext>
   </a:extLst>
 </a:theme>
